--- a/28_College/teacher_prep/slides/Week_15_Capstone_Delivery_Showcase_and_Looking_Forward.pptx
+++ b/28_College/teacher_prep/slides/Week_15_Capstone_Delivery_Showcase_and_Looking_Forward.pptx
@@ -790,7 +790,7 @@
           <a:lstStyle/>
           <a:p>
             <a:r>
-              <a:t>No credit is guaranteed or implied by Competence Collective.</a:t>
+              <a:t>No credit is guaranteed or implied by the Hackles team.</a:t>
             </a:r>
           </a:p>
         </p:txBody>
